--- a/static/images/project/blog graphic size.pptx
+++ b/static/images/project/blog graphic size.pptx
@@ -243,7 +243,7 @@
           <a:p>
             <a:fld id="{03FB8AE5-4979-984F-8FD7-52D4A3BB0305}" type="datetimeFigureOut">
               <a:rPr lang="en-US" smtClean="0"/>
-              <a:t>11/3/25</a:t>
+              <a:t>6/9/26</a:t>
             </a:fld>
             <a:endParaRPr lang="en-US"/>
           </a:p>
@@ -413,7 +413,7 @@
           <a:p>
             <a:fld id="{03FB8AE5-4979-984F-8FD7-52D4A3BB0305}" type="datetimeFigureOut">
               <a:rPr lang="en-US" smtClean="0"/>
-              <a:t>11/3/25</a:t>
+              <a:t>6/9/26</a:t>
             </a:fld>
             <a:endParaRPr lang="en-US"/>
           </a:p>
@@ -593,7 +593,7 @@
           <a:p>
             <a:fld id="{03FB8AE5-4979-984F-8FD7-52D4A3BB0305}" type="datetimeFigureOut">
               <a:rPr lang="en-US" smtClean="0"/>
-              <a:t>11/3/25</a:t>
+              <a:t>6/9/26</a:t>
             </a:fld>
             <a:endParaRPr lang="en-US"/>
           </a:p>
@@ -763,7 +763,7 @@
           <a:p>
             <a:fld id="{03FB8AE5-4979-984F-8FD7-52D4A3BB0305}" type="datetimeFigureOut">
               <a:rPr lang="en-US" smtClean="0"/>
-              <a:t>11/3/25</a:t>
+              <a:t>6/9/26</a:t>
             </a:fld>
             <a:endParaRPr lang="en-US"/>
           </a:p>
@@ -1009,7 +1009,7 @@
           <a:p>
             <a:fld id="{03FB8AE5-4979-984F-8FD7-52D4A3BB0305}" type="datetimeFigureOut">
               <a:rPr lang="en-US" smtClean="0"/>
-              <a:t>11/3/25</a:t>
+              <a:t>6/9/26</a:t>
             </a:fld>
             <a:endParaRPr lang="en-US"/>
           </a:p>
@@ -1241,7 +1241,7 @@
           <a:p>
             <a:fld id="{03FB8AE5-4979-984F-8FD7-52D4A3BB0305}" type="datetimeFigureOut">
               <a:rPr lang="en-US" smtClean="0"/>
-              <a:t>11/3/25</a:t>
+              <a:t>6/9/26</a:t>
             </a:fld>
             <a:endParaRPr lang="en-US"/>
           </a:p>
@@ -1608,7 +1608,7 @@
           <a:p>
             <a:fld id="{03FB8AE5-4979-984F-8FD7-52D4A3BB0305}" type="datetimeFigureOut">
               <a:rPr lang="en-US" smtClean="0"/>
-              <a:t>11/3/25</a:t>
+              <a:t>6/9/26</a:t>
             </a:fld>
             <a:endParaRPr lang="en-US"/>
           </a:p>
@@ -1726,7 +1726,7 @@
           <a:p>
             <a:fld id="{03FB8AE5-4979-984F-8FD7-52D4A3BB0305}" type="datetimeFigureOut">
               <a:rPr lang="en-US" smtClean="0"/>
-              <a:t>11/3/25</a:t>
+              <a:t>6/9/26</a:t>
             </a:fld>
             <a:endParaRPr lang="en-US"/>
           </a:p>
@@ -1821,7 +1821,7 @@
           <a:p>
             <a:fld id="{03FB8AE5-4979-984F-8FD7-52D4A3BB0305}" type="datetimeFigureOut">
               <a:rPr lang="en-US" smtClean="0"/>
-              <a:t>11/3/25</a:t>
+              <a:t>6/9/26</a:t>
             </a:fld>
             <a:endParaRPr lang="en-US"/>
           </a:p>
@@ -2098,7 +2098,7 @@
           <a:p>
             <a:fld id="{03FB8AE5-4979-984F-8FD7-52D4A3BB0305}" type="datetimeFigureOut">
               <a:rPr lang="en-US" smtClean="0"/>
-              <a:t>11/3/25</a:t>
+              <a:t>6/9/26</a:t>
             </a:fld>
             <a:endParaRPr lang="en-US"/>
           </a:p>
@@ -2355,7 +2355,7 @@
           <a:p>
             <a:fld id="{03FB8AE5-4979-984F-8FD7-52D4A3BB0305}" type="datetimeFigureOut">
               <a:rPr lang="en-US" smtClean="0"/>
-              <a:t>11/3/25</a:t>
+              <a:t>6/9/26</a:t>
             </a:fld>
             <a:endParaRPr lang="en-US"/>
           </a:p>
@@ -2568,7 +2568,7 @@
           <a:p>
             <a:fld id="{03FB8AE5-4979-984F-8FD7-52D4A3BB0305}" type="datetimeFigureOut">
               <a:rPr lang="en-US" smtClean="0"/>
-              <a:t>11/3/25</a:t>
+              <a:t>6/9/26</a:t>
             </a:fld>
             <a:endParaRPr lang="en-US"/>
           </a:p>
@@ -3080,6 +3080,37 @@
           </a:prstGeom>
         </p:spPr>
       </p:pic>
+      <p:pic>
+        <p:nvPicPr>
+          <p:cNvPr id="3" name="Picture 2">
+            <a:extLst>
+              <a:ext uri="{FF2B5EF4-FFF2-40B4-BE49-F238E27FC236}">
+                <a16:creationId xmlns:a16="http://schemas.microsoft.com/office/drawing/2014/main" id="{0409B8E5-DF1E-77B7-71C5-0EB1F01BFC47}"/>
+              </a:ext>
+            </a:extLst>
+          </p:cNvPr>
+          <p:cNvPicPr>
+            <a:picLocks noChangeAspect="1"/>
+          </p:cNvPicPr>
+          <p:nvPr/>
+        </p:nvPicPr>
+        <p:blipFill>
+          <a:blip r:embed="rId4"/>
+          <a:srcRect t="4658" b="4658"/>
+          <a:stretch>
+            <a:fillRect/>
+          </a:stretch>
+        </p:blipFill>
+        <p:spPr>
+          <a:xfrm>
+            <a:off x="0" y="0"/>
+            <a:ext cx="7772400" cy="4731026"/>
+          </a:xfrm>
+          <a:prstGeom prst="rect">
+            <a:avLst/>
+          </a:prstGeom>
+        </p:spPr>
+      </p:pic>
     </p:spTree>
     <p:extLst>
       <p:ext uri="{BB962C8B-B14F-4D97-AF65-F5344CB8AC3E}">

--- a/static/images/project/blog graphic size.pptx
+++ b/static/images/project/blog graphic size.pptx
@@ -243,7 +243,7 @@
           <a:p>
             <a:fld id="{03FB8AE5-4979-984F-8FD7-52D4A3BB0305}" type="datetimeFigureOut">
               <a:rPr lang="en-US" smtClean="0"/>
-              <a:t>6/9/26</a:t>
+              <a:t>8/26/26</a:t>
             </a:fld>
             <a:endParaRPr lang="en-US"/>
           </a:p>
@@ -413,7 +413,7 @@
           <a:p>
             <a:fld id="{03FB8AE5-4979-984F-8FD7-52D4A3BB0305}" type="datetimeFigureOut">
               <a:rPr lang="en-US" smtClean="0"/>
-              <a:t>6/9/26</a:t>
+              <a:t>8/26/26</a:t>
             </a:fld>
             <a:endParaRPr lang="en-US"/>
           </a:p>
@@ -593,7 +593,7 @@
           <a:p>
             <a:fld id="{03FB8AE5-4979-984F-8FD7-52D4A3BB0305}" type="datetimeFigureOut">
               <a:rPr lang="en-US" smtClean="0"/>
-              <a:t>6/9/26</a:t>
+              <a:t>8/26/26</a:t>
             </a:fld>
             <a:endParaRPr lang="en-US"/>
           </a:p>
@@ -763,7 +763,7 @@
           <a:p>
             <a:fld id="{03FB8AE5-4979-984F-8FD7-52D4A3BB0305}" type="datetimeFigureOut">
               <a:rPr lang="en-US" smtClean="0"/>
-              <a:t>6/9/26</a:t>
+              <a:t>8/26/26</a:t>
             </a:fld>
             <a:endParaRPr lang="en-US"/>
           </a:p>
@@ -1009,7 +1009,7 @@
           <a:p>
             <a:fld id="{03FB8AE5-4979-984F-8FD7-52D4A3BB0305}" type="datetimeFigureOut">
               <a:rPr lang="en-US" smtClean="0"/>
-              <a:t>6/9/26</a:t>
+              <a:t>8/26/26</a:t>
             </a:fld>
             <a:endParaRPr lang="en-US"/>
           </a:p>
@@ -1241,7 +1241,7 @@
           <a:p>
             <a:fld id="{03FB8AE5-4979-984F-8FD7-52D4A3BB0305}" type="datetimeFigureOut">
               <a:rPr lang="en-US" smtClean="0"/>
-              <a:t>6/9/26</a:t>
+              <a:t>8/26/26</a:t>
             </a:fld>
             <a:endParaRPr lang="en-US"/>
           </a:p>
@@ -1608,7 +1608,7 @@
           <a:p>
             <a:fld id="{03FB8AE5-4979-984F-8FD7-52D4A3BB0305}" type="datetimeFigureOut">
               <a:rPr lang="en-US" smtClean="0"/>
-              <a:t>6/9/26</a:t>
+              <a:t>8/26/26</a:t>
             </a:fld>
             <a:endParaRPr lang="en-US"/>
           </a:p>
@@ -1726,7 +1726,7 @@
           <a:p>
             <a:fld id="{03FB8AE5-4979-984F-8FD7-52D4A3BB0305}" type="datetimeFigureOut">
               <a:rPr lang="en-US" smtClean="0"/>
-              <a:t>6/9/26</a:t>
+              <a:t>8/26/26</a:t>
             </a:fld>
             <a:endParaRPr lang="en-US"/>
           </a:p>
@@ -1821,7 +1821,7 @@
           <a:p>
             <a:fld id="{03FB8AE5-4979-984F-8FD7-52D4A3BB0305}" type="datetimeFigureOut">
               <a:rPr lang="en-US" smtClean="0"/>
-              <a:t>6/9/26</a:t>
+              <a:t>8/26/26</a:t>
             </a:fld>
             <a:endParaRPr lang="en-US"/>
           </a:p>
@@ -2098,7 +2098,7 @@
           <a:p>
             <a:fld id="{03FB8AE5-4979-984F-8FD7-52D4A3BB0305}" type="datetimeFigureOut">
               <a:rPr lang="en-US" smtClean="0"/>
-              <a:t>6/9/26</a:t>
+              <a:t>8/26/26</a:t>
             </a:fld>
             <a:endParaRPr lang="en-US"/>
           </a:p>
@@ -2355,7 +2355,7 @@
           <a:p>
             <a:fld id="{03FB8AE5-4979-984F-8FD7-52D4A3BB0305}" type="datetimeFigureOut">
               <a:rPr lang="en-US" smtClean="0"/>
-              <a:t>6/9/26</a:t>
+              <a:t>8/26/26</a:t>
             </a:fld>
             <a:endParaRPr lang="en-US"/>
           </a:p>
@@ -2568,7 +2568,7 @@
           <a:p>
             <a:fld id="{03FB8AE5-4979-984F-8FD7-52D4A3BB0305}" type="datetimeFigureOut">
               <a:rPr lang="en-US" smtClean="0"/>
-              <a:t>6/9/26</a:t>
+              <a:t>8/26/26</a:t>
             </a:fld>
             <a:endParaRPr lang="en-US"/>
           </a:p>
@@ -3111,6 +3111,337 @@
           </a:prstGeom>
         </p:spPr>
       </p:pic>
+      <p:pic>
+        <p:nvPicPr>
+          <p:cNvPr id="4" name="Picture 3">
+            <a:extLst>
+              <a:ext uri="{FF2B5EF4-FFF2-40B4-BE49-F238E27FC236}">
+                <a16:creationId xmlns:a16="http://schemas.microsoft.com/office/drawing/2014/main" id="{7ECCF4D4-D258-9C7D-DF52-2E7D754643A7}"/>
+              </a:ext>
+            </a:extLst>
+          </p:cNvPr>
+          <p:cNvPicPr>
+            <a:picLocks noChangeAspect="1"/>
+          </p:cNvPicPr>
+          <p:nvPr/>
+        </p:nvPicPr>
+        <p:blipFill>
+          <a:blip r:embed="rId5"/>
+          <a:srcRect r="7589"/>
+          <a:stretch>
+            <a:fillRect/>
+          </a:stretch>
+        </p:blipFill>
+        <p:spPr>
+          <a:xfrm>
+            <a:off x="0" y="0"/>
+            <a:ext cx="7772400" cy="4731026"/>
+          </a:xfrm>
+          <a:prstGeom prst="rect">
+            <a:avLst/>
+          </a:prstGeom>
+        </p:spPr>
+      </p:pic>
+      <p:grpSp>
+        <p:nvGrpSpPr>
+          <p:cNvPr id="35" name="Group 34">
+            <a:extLst>
+              <a:ext uri="{FF2B5EF4-FFF2-40B4-BE49-F238E27FC236}">
+                <a16:creationId xmlns:a16="http://schemas.microsoft.com/office/drawing/2014/main" id="{5CEAA987-B29B-5B82-2CE7-E8A6696D5D49}"/>
+              </a:ext>
+            </a:extLst>
+          </p:cNvPr>
+          <p:cNvGrpSpPr/>
+          <p:nvPr/>
+        </p:nvGrpSpPr>
+        <p:grpSpPr>
+          <a:xfrm>
+            <a:off x="0" y="-1"/>
+            <a:ext cx="7772400" cy="4726074"/>
+            <a:chOff x="0" y="-1"/>
+            <a:chExt cx="7772400" cy="4726074"/>
+          </a:xfrm>
+        </p:grpSpPr>
+        <p:pic>
+          <p:nvPicPr>
+            <p:cNvPr id="14" name="Picture 13">
+              <a:extLst>
+                <a:ext uri="{FF2B5EF4-FFF2-40B4-BE49-F238E27FC236}">
+                  <a16:creationId xmlns:a16="http://schemas.microsoft.com/office/drawing/2014/main" id="{61B77FF9-A29E-BBA3-93F5-3C5CCCBC9230}"/>
+                </a:ext>
+              </a:extLst>
+            </p:cNvPr>
+            <p:cNvPicPr>
+              <a:picLocks noChangeAspect="1"/>
+            </p:cNvPicPr>
+            <p:nvPr/>
+          </p:nvPicPr>
+          <p:blipFill>
+            <a:blip r:embed="rId6"/>
+            <a:stretch>
+              <a:fillRect/>
+            </a:stretch>
+          </p:blipFill>
+          <p:spPr>
+            <a:xfrm>
+              <a:off x="0" y="-1"/>
+              <a:ext cx="7772400" cy="4726074"/>
+            </a:xfrm>
+            <a:prstGeom prst="rect">
+              <a:avLst/>
+            </a:prstGeom>
+          </p:spPr>
+        </p:pic>
+        <p:pic>
+          <p:nvPicPr>
+            <p:cNvPr id="16" name="Picture 15">
+              <a:extLst>
+                <a:ext uri="{FF2B5EF4-FFF2-40B4-BE49-F238E27FC236}">
+                  <a16:creationId xmlns:a16="http://schemas.microsoft.com/office/drawing/2014/main" id="{A288CC47-7528-87BA-72FB-0C15FAA12FF7}"/>
+                </a:ext>
+              </a:extLst>
+            </p:cNvPr>
+            <p:cNvPicPr>
+              <a:picLocks noChangeAspect="1"/>
+            </p:cNvPicPr>
+            <p:nvPr/>
+          </p:nvPicPr>
+          <p:blipFill>
+            <a:blip r:embed="rId7">
+              <a:biLevel thresh="75000"/>
+              <a:extLst>
+                <a:ext uri="{BEBA8EAE-BF5A-486C-A8C5-ECC9F3942E4B}">
+                  <a14:imgProps xmlns:a14="http://schemas.microsoft.com/office/drawing/2010/main">
+                    <a14:imgLayer r:embed="rId8">
+                      <a14:imgEffect>
+                        <a14:artisticPhotocopy/>
+                      </a14:imgEffect>
+                      <a14:imgEffect>
+                        <a14:saturation sat="0"/>
+                      </a14:imgEffect>
+                    </a14:imgLayer>
+                  </a14:imgProps>
+                </a:ext>
+              </a:extLst>
+            </a:blip>
+            <a:stretch>
+              <a:fillRect/>
+            </a:stretch>
+          </p:blipFill>
+          <p:spPr>
+            <a:xfrm>
+              <a:off x="3611456" y="908283"/>
+              <a:ext cx="812800" cy="812800"/>
+            </a:xfrm>
+            <a:prstGeom prst="rect">
+              <a:avLst/>
+            </a:prstGeom>
+            <a:noFill/>
+          </p:spPr>
+        </p:pic>
+        <p:pic>
+          <p:nvPicPr>
+            <p:cNvPr id="18" name="Picture 17">
+              <a:extLst>
+                <a:ext uri="{FF2B5EF4-FFF2-40B4-BE49-F238E27FC236}">
+                  <a16:creationId xmlns:a16="http://schemas.microsoft.com/office/drawing/2014/main" id="{95325208-A503-E662-B9AB-FE2A1AADAE56}"/>
+                </a:ext>
+              </a:extLst>
+            </p:cNvPr>
+            <p:cNvPicPr>
+              <a:picLocks noChangeAspect="1"/>
+            </p:cNvPicPr>
+            <p:nvPr/>
+          </p:nvPicPr>
+          <p:blipFill>
+            <a:blip r:embed="rId9"/>
+            <a:stretch>
+              <a:fillRect/>
+            </a:stretch>
+          </p:blipFill>
+          <p:spPr>
+            <a:xfrm>
+              <a:off x="2130186" y="1952767"/>
+              <a:ext cx="812800" cy="812800"/>
+            </a:xfrm>
+            <a:prstGeom prst="rect">
+              <a:avLst/>
+            </a:prstGeom>
+          </p:spPr>
+        </p:pic>
+        <p:pic>
+          <p:nvPicPr>
+            <p:cNvPr id="20" name="Picture 19">
+              <a:extLst>
+                <a:ext uri="{FF2B5EF4-FFF2-40B4-BE49-F238E27FC236}">
+                  <a16:creationId xmlns:a16="http://schemas.microsoft.com/office/drawing/2014/main" id="{7843805A-2E4D-8E59-A8D9-4E199CD6B6E4}"/>
+                </a:ext>
+              </a:extLst>
+            </p:cNvPr>
+            <p:cNvPicPr>
+              <a:picLocks noChangeAspect="1"/>
+            </p:cNvPicPr>
+            <p:nvPr/>
+          </p:nvPicPr>
+          <p:blipFill>
+            <a:blip r:embed="rId10"/>
+            <a:stretch>
+              <a:fillRect/>
+            </a:stretch>
+          </p:blipFill>
+          <p:spPr>
+            <a:xfrm>
+              <a:off x="4478207" y="3326267"/>
+              <a:ext cx="812800" cy="812800"/>
+            </a:xfrm>
+            <a:prstGeom prst="rect">
+              <a:avLst/>
+            </a:prstGeom>
+          </p:spPr>
+        </p:pic>
+        <p:pic>
+          <p:nvPicPr>
+            <p:cNvPr id="22" name="Picture 21">
+              <a:extLst>
+                <a:ext uri="{FF2B5EF4-FFF2-40B4-BE49-F238E27FC236}">
+                  <a16:creationId xmlns:a16="http://schemas.microsoft.com/office/drawing/2014/main" id="{49A1E195-1FB1-21C5-3BBC-F0E9763CF32C}"/>
+                </a:ext>
+              </a:extLst>
+            </p:cNvPr>
+            <p:cNvPicPr>
+              <a:picLocks noChangeAspect="1"/>
+            </p:cNvPicPr>
+            <p:nvPr/>
+          </p:nvPicPr>
+          <p:blipFill>
+            <a:blip r:embed="rId11"/>
+            <a:stretch>
+              <a:fillRect/>
+            </a:stretch>
+          </p:blipFill>
+          <p:spPr>
+            <a:xfrm>
+              <a:off x="3367718" y="3840758"/>
+              <a:ext cx="272401" cy="272401"/>
+            </a:xfrm>
+            <a:prstGeom prst="rect">
+              <a:avLst/>
+            </a:prstGeom>
+          </p:spPr>
+        </p:pic>
+        <p:pic>
+          <p:nvPicPr>
+            <p:cNvPr id="26" name="Picture 25">
+              <a:extLst>
+                <a:ext uri="{FF2B5EF4-FFF2-40B4-BE49-F238E27FC236}">
+                  <a16:creationId xmlns:a16="http://schemas.microsoft.com/office/drawing/2014/main" id="{1CF2AD2A-7043-F572-8B11-39B0F16F894C}"/>
+                </a:ext>
+              </a:extLst>
+            </p:cNvPr>
+            <p:cNvPicPr>
+              <a:picLocks noChangeAspect="1"/>
+            </p:cNvPicPr>
+            <p:nvPr/>
+          </p:nvPicPr>
+          <p:blipFill>
+            <a:blip r:embed="rId12"/>
+            <a:stretch>
+              <a:fillRect/>
+            </a:stretch>
+          </p:blipFill>
+          <p:spPr>
+            <a:xfrm>
+              <a:off x="2889197" y="3300448"/>
+              <a:ext cx="614722" cy="614722"/>
+            </a:xfrm>
+            <a:prstGeom prst="rect">
+              <a:avLst/>
+            </a:prstGeom>
+          </p:spPr>
+        </p:pic>
+        <p:pic>
+          <p:nvPicPr>
+            <p:cNvPr id="31" name="Picture 30">
+              <a:extLst>
+                <a:ext uri="{FF2B5EF4-FFF2-40B4-BE49-F238E27FC236}">
+                  <a16:creationId xmlns:a16="http://schemas.microsoft.com/office/drawing/2014/main" id="{08947ED5-0EA3-B484-A665-4EA964DC4D43}"/>
+                </a:ext>
+              </a:extLst>
+            </p:cNvPr>
+            <p:cNvPicPr>
+              <a:picLocks noChangeAspect="1"/>
+            </p:cNvPicPr>
+            <p:nvPr/>
+          </p:nvPicPr>
+          <p:blipFill>
+            <a:blip r:embed="rId13"/>
+            <a:stretch>
+              <a:fillRect/>
+            </a:stretch>
+          </p:blipFill>
+          <p:spPr>
+            <a:xfrm>
+              <a:off x="5202091" y="1855753"/>
+              <a:ext cx="812800" cy="812800"/>
+            </a:xfrm>
+            <a:prstGeom prst="rect">
+              <a:avLst/>
+            </a:prstGeom>
+          </p:spPr>
+        </p:pic>
+        <p:sp>
+          <p:nvSpPr>
+            <p:cNvPr id="34" name="Oval 33">
+              <a:extLst>
+                <a:ext uri="{FF2B5EF4-FFF2-40B4-BE49-F238E27FC236}">
+                  <a16:creationId xmlns:a16="http://schemas.microsoft.com/office/drawing/2014/main" id="{19EC5A1C-54E5-26D9-AD73-24767057A98E}"/>
+                </a:ext>
+              </a:extLst>
+            </p:cNvPr>
+            <p:cNvSpPr/>
+            <p:nvPr/>
+          </p:nvSpPr>
+          <p:spPr>
+            <a:xfrm>
+              <a:off x="2889197" y="1314683"/>
+              <a:ext cx="2312894" cy="2186300"/>
+            </a:xfrm>
+            <a:prstGeom prst="ellipse">
+              <a:avLst/>
+            </a:prstGeom>
+            <a:noFill/>
+            <a:ln w="38100">
+              <a:solidFill>
+                <a:schemeClr val="bg1"/>
+              </a:solidFill>
+            </a:ln>
+          </p:spPr>
+          <p:style>
+            <a:lnRef idx="2">
+              <a:schemeClr val="accent1">
+                <a:shade val="15000"/>
+              </a:schemeClr>
+            </a:lnRef>
+            <a:fillRef idx="1">
+              <a:schemeClr val="accent1"/>
+            </a:fillRef>
+            <a:effectRef idx="0">
+              <a:schemeClr val="accent1"/>
+            </a:effectRef>
+            <a:fontRef idx="minor">
+              <a:schemeClr val="lt1"/>
+            </a:fontRef>
+          </p:style>
+          <p:txBody>
+            <a:bodyPr rtlCol="0" anchor="ctr"/>
+            <a:lstStyle/>
+            <a:p>
+              <a:pPr algn="ctr"/>
+              <a:endParaRPr lang="en-GB"/>
+            </a:p>
+          </p:txBody>
+        </p:sp>
+      </p:grpSp>
     </p:spTree>
     <p:extLst>
       <p:ext uri="{BB962C8B-B14F-4D97-AF65-F5344CB8AC3E}">
